--- a/05 Отчёты/Презентации/DML_Анализ_LogFiles_730E.pptx
+++ b/05 Отчёты/Презентации/DML_Анализ_LogFiles_730E.pptx
@@ -8701,7 +8701,7 @@
                   <a:srgbClr val="667788"/>
                 </a:solidFill>
               </a:rPr>
-              <a:t>EGT 730E ниже NTE200 (нет TIB=200%).
+              <a:t>EGT 730E ниже NTE200 (защиты включены, обороты ниже).
 Базовый уровень EGT: 400–450°C при нагрузке 70–90%.</a:t>
             </a:r>
           </a:p>
